--- a/docs/figs/schematic_overview.pptx
+++ b/docs/figs/schematic_overview.pptx
@@ -5,10 +5,11 @@
     <p:sldMasterId id="2147483720" r:id="rId1"/>
   </p:sldMasterIdLst>
   <p:notesMasterIdLst>
-    <p:notesMasterId r:id="rId3"/>
+    <p:notesMasterId r:id="rId4"/>
   </p:notesMasterIdLst>
   <p:sldIdLst>
     <p:sldId id="256" r:id="rId2"/>
+    <p:sldId id="257" r:id="rId3"/>
   </p:sldIdLst>
   <p:sldSz cx="6119813" cy="7920038"/>
   <p:notesSz cx="6858000" cy="9144000"/>
@@ -197,7 +198,7 @@
           <a:p>
             <a:fld id="{B292C735-45A6-4806-AAF5-FAEAE978D222}" type="datetimeFigureOut">
               <a:rPr lang="en-NL" smtClean="0"/>
-              <a:t>16/08/2022</a:t>
+              <a:t>15/05/2026</a:t>
             </a:fld>
             <a:endParaRPr lang="en-NL"/>
           </a:p>
@@ -685,7 +686,7 @@
           <a:p>
             <a:fld id="{82D27196-1245-4BB2-84DD-54A9D6EE0062}" type="datetimeFigureOut">
               <a:rPr lang="en-NL" smtClean="0"/>
-              <a:t>16/08/2022</a:t>
+              <a:t>15/05/2026</a:t>
             </a:fld>
             <a:endParaRPr lang="en-NL"/>
           </a:p>
@@ -855,7 +856,7 @@
           <a:p>
             <a:fld id="{82D27196-1245-4BB2-84DD-54A9D6EE0062}" type="datetimeFigureOut">
               <a:rPr lang="en-NL" smtClean="0"/>
-              <a:t>16/08/2022</a:t>
+              <a:t>15/05/2026</a:t>
             </a:fld>
             <a:endParaRPr lang="en-NL"/>
           </a:p>
@@ -1035,7 +1036,7 @@
           <a:p>
             <a:fld id="{82D27196-1245-4BB2-84DD-54A9D6EE0062}" type="datetimeFigureOut">
               <a:rPr lang="en-NL" smtClean="0"/>
-              <a:t>16/08/2022</a:t>
+              <a:t>15/05/2026</a:t>
             </a:fld>
             <a:endParaRPr lang="en-NL"/>
           </a:p>
@@ -1205,7 +1206,7 @@
           <a:p>
             <a:fld id="{82D27196-1245-4BB2-84DD-54A9D6EE0062}" type="datetimeFigureOut">
               <a:rPr lang="en-NL" smtClean="0"/>
-              <a:t>16/08/2022</a:t>
+              <a:t>15/05/2026</a:t>
             </a:fld>
             <a:endParaRPr lang="en-NL"/>
           </a:p>
@@ -1449,7 +1450,7 @@
           <a:p>
             <a:fld id="{82D27196-1245-4BB2-84DD-54A9D6EE0062}" type="datetimeFigureOut">
               <a:rPr lang="en-NL" smtClean="0"/>
-              <a:t>16/08/2022</a:t>
+              <a:t>15/05/2026</a:t>
             </a:fld>
             <a:endParaRPr lang="en-NL"/>
           </a:p>
@@ -1681,7 +1682,7 @@
           <a:p>
             <a:fld id="{82D27196-1245-4BB2-84DD-54A9D6EE0062}" type="datetimeFigureOut">
               <a:rPr lang="en-NL" smtClean="0"/>
-              <a:t>16/08/2022</a:t>
+              <a:t>15/05/2026</a:t>
             </a:fld>
             <a:endParaRPr lang="en-NL"/>
           </a:p>
@@ -2048,7 +2049,7 @@
           <a:p>
             <a:fld id="{82D27196-1245-4BB2-84DD-54A9D6EE0062}" type="datetimeFigureOut">
               <a:rPr lang="en-NL" smtClean="0"/>
-              <a:t>16/08/2022</a:t>
+              <a:t>15/05/2026</a:t>
             </a:fld>
             <a:endParaRPr lang="en-NL"/>
           </a:p>
@@ -2166,7 +2167,7 @@
           <a:p>
             <a:fld id="{82D27196-1245-4BB2-84DD-54A9D6EE0062}" type="datetimeFigureOut">
               <a:rPr lang="en-NL" smtClean="0"/>
-              <a:t>16/08/2022</a:t>
+              <a:t>15/05/2026</a:t>
             </a:fld>
             <a:endParaRPr lang="en-NL"/>
           </a:p>
@@ -2261,7 +2262,7 @@
           <a:p>
             <a:fld id="{82D27196-1245-4BB2-84DD-54A9D6EE0062}" type="datetimeFigureOut">
               <a:rPr lang="en-NL" smtClean="0"/>
-              <a:t>16/08/2022</a:t>
+              <a:t>15/05/2026</a:t>
             </a:fld>
             <a:endParaRPr lang="en-NL"/>
           </a:p>
@@ -2538,7 +2539,7 @@
           <a:p>
             <a:fld id="{82D27196-1245-4BB2-84DD-54A9D6EE0062}" type="datetimeFigureOut">
               <a:rPr lang="en-NL" smtClean="0"/>
-              <a:t>16/08/2022</a:t>
+              <a:t>15/05/2026</a:t>
             </a:fld>
             <a:endParaRPr lang="en-NL"/>
           </a:p>
@@ -2795,7 +2796,7 @@
           <a:p>
             <a:fld id="{82D27196-1245-4BB2-84DD-54A9D6EE0062}" type="datetimeFigureOut">
               <a:rPr lang="en-NL" smtClean="0"/>
-              <a:t>16/08/2022</a:t>
+              <a:t>15/05/2026</a:t>
             </a:fld>
             <a:endParaRPr lang="en-NL"/>
           </a:p>
@@ -3008,7 +3009,7 @@
           <a:p>
             <a:fld id="{82D27196-1245-4BB2-84DD-54A9D6EE0062}" type="datetimeFigureOut">
               <a:rPr lang="en-NL" smtClean="0"/>
-              <a:t>16/08/2022</a:t>
+              <a:t>15/05/2026</a:t>
             </a:fld>
             <a:endParaRPr lang="en-NL"/>
           </a:p>
@@ -4051,11 +4052,11 @@
             <a:blip r:embed="rId3">
               <a:extLst>
                 <a:ext uri="{28A0092B-C50C-407E-A947-70E740481C1C}">
-                  <a14:useLocalDpi xmlns:a14="http://schemas.microsoft.com/office/drawing/2010/main" val="0"/>
+                  <a14:useLocalDpi xmlns:a14="http://schemas.microsoft.com/office/drawing/2010/main"/>
                 </a:ext>
               </a:extLst>
             </a:blip>
-            <a:srcRect t="8576" r="7249"/>
+            <a:srcRect/>
             <a:stretch/>
           </p:blipFill>
           <p:spPr bwMode="auto">
@@ -4096,11 +4097,11 @@
             <a:blip r:embed="rId3">
               <a:extLst>
                 <a:ext uri="{28A0092B-C50C-407E-A947-70E740481C1C}">
-                  <a14:useLocalDpi xmlns:a14="http://schemas.microsoft.com/office/drawing/2010/main" val="0"/>
+                  <a14:useLocalDpi xmlns:a14="http://schemas.microsoft.com/office/drawing/2010/main"/>
                 </a:ext>
               </a:extLst>
             </a:blip>
-            <a:srcRect t="8576" r="7249"/>
+            <a:srcRect/>
             <a:stretch/>
           </p:blipFill>
           <p:spPr bwMode="auto">
@@ -4141,11 +4142,11 @@
             <a:blip r:embed="rId3">
               <a:extLst>
                 <a:ext uri="{28A0092B-C50C-407E-A947-70E740481C1C}">
-                  <a14:useLocalDpi xmlns:a14="http://schemas.microsoft.com/office/drawing/2010/main" val="0"/>
+                  <a14:useLocalDpi xmlns:a14="http://schemas.microsoft.com/office/drawing/2010/main"/>
                 </a:ext>
               </a:extLst>
             </a:blip>
-            <a:srcRect t="8576" r="7249"/>
+            <a:srcRect/>
             <a:stretch/>
           </p:blipFill>
           <p:spPr bwMode="auto">
@@ -4459,7 +4460,7 @@
           <a:blip r:embed="rId4">
             <a:extLst>
               <a:ext uri="{28A0092B-C50C-407E-A947-70E740481C1C}">
-                <a14:useLocalDpi xmlns:a14="http://schemas.microsoft.com/office/drawing/2010/main" val="0"/>
+                <a14:useLocalDpi xmlns:a14="http://schemas.microsoft.com/office/drawing/2010/main"/>
               </a:ext>
             </a:extLst>
           </a:blip>
@@ -4568,11 +4569,11 @@
           <a:blip r:embed="rId5">
             <a:extLst>
               <a:ext uri="{28A0092B-C50C-407E-A947-70E740481C1C}">
-                <a14:useLocalDpi xmlns:a14="http://schemas.microsoft.com/office/drawing/2010/main" val="0"/>
+                <a14:useLocalDpi xmlns:a14="http://schemas.microsoft.com/office/drawing/2010/main"/>
               </a:ext>
             </a:extLst>
           </a:blip>
-          <a:srcRect t="8717"/>
+          <a:srcRect/>
           <a:stretch/>
         </p:blipFill>
         <p:spPr>
@@ -5300,11 +5301,11 @@
           <a:blip r:embed="rId6">
             <a:extLst>
               <a:ext uri="{28A0092B-C50C-407E-A947-70E740481C1C}">
-                <a14:useLocalDpi xmlns:a14="http://schemas.microsoft.com/office/drawing/2010/main" val="0"/>
+                <a14:useLocalDpi xmlns:a14="http://schemas.microsoft.com/office/drawing/2010/main"/>
               </a:ext>
             </a:extLst>
           </a:blip>
-          <a:srcRect r="33341" b="66323"/>
+          <a:srcRect/>
           <a:stretch/>
         </p:blipFill>
         <p:spPr bwMode="auto">
@@ -5345,7 +5346,7 @@
           <a:blip r:embed="rId7">
             <a:extLst>
               <a:ext uri="{28A0092B-C50C-407E-A947-70E740481C1C}">
-                <a14:useLocalDpi xmlns:a14="http://schemas.microsoft.com/office/drawing/2010/main" val="0"/>
+                <a14:useLocalDpi xmlns:a14="http://schemas.microsoft.com/office/drawing/2010/main"/>
               </a:ext>
             </a:extLst>
           </a:blip>
@@ -5392,7 +5393,7 @@
           <a:blip r:embed="rId8">
             <a:extLst>
               <a:ext uri="{28A0092B-C50C-407E-A947-70E740481C1C}">
-                <a14:useLocalDpi xmlns:a14="http://schemas.microsoft.com/office/drawing/2010/main" val="0"/>
+                <a14:useLocalDpi xmlns:a14="http://schemas.microsoft.com/office/drawing/2010/main"/>
               </a:ext>
             </a:extLst>
           </a:blip>
@@ -5439,7 +5440,7 @@
           <a:blip r:embed="rId9">
             <a:extLst>
               <a:ext uri="{28A0092B-C50C-407E-A947-70E740481C1C}">
-                <a14:useLocalDpi xmlns:a14="http://schemas.microsoft.com/office/drawing/2010/main" val="0"/>
+                <a14:useLocalDpi xmlns:a14="http://schemas.microsoft.com/office/drawing/2010/main"/>
               </a:ext>
             </a:extLst>
           </a:blip>
@@ -5724,6 +5725,996 @@
     <p:extLst>
       <p:ext uri="{BB962C8B-B14F-4D97-AF65-F5344CB8AC3E}">
         <p14:creationId xmlns:p14="http://schemas.microsoft.com/office/powerpoint/2010/main" val="2879121924"/>
+      </p:ext>
+    </p:extLst>
+  </p:cSld>
+  <p:clrMapOvr>
+    <a:masterClrMapping/>
+  </p:clrMapOvr>
+</p:sld>
+</file>
+
+<file path=ppt/slides/slide2.xml><?xml version="1.0" encoding="utf-8"?>
+<p:sld xmlns:a="http://schemas.openxmlformats.org/drawingml/2006/main" xmlns:r="http://schemas.openxmlformats.org/officeDocument/2006/relationships" xmlns:p="http://schemas.openxmlformats.org/presentationml/2006/main">
+  <p:cSld>
+    <p:spTree>
+      <p:nvGrpSpPr>
+        <p:cNvPr id="1" name=""/>
+        <p:cNvGrpSpPr/>
+        <p:nvPr/>
+      </p:nvGrpSpPr>
+      <p:grpSpPr>
+        <a:xfrm>
+          <a:off x="0" y="0"/>
+          <a:ext cx="0" cy="0"/>
+          <a:chOff x="0" y="0"/>
+          <a:chExt cx="0" cy="0"/>
+        </a:xfrm>
+      </p:grpSpPr>
+      <p:sp>
+        <p:nvSpPr>
+          <p:cNvPr id="21" name="Rectangle: Rounded Corners 20">
+            <a:extLst>
+              <a:ext uri="{FF2B5EF4-FFF2-40B4-BE49-F238E27FC236}">
+                <a16:creationId xmlns:a16="http://schemas.microsoft.com/office/drawing/2014/main" id="{18604D6E-00CA-3976-0DC0-1458FA85B8A9}"/>
+              </a:ext>
+            </a:extLst>
+          </p:cNvPr>
+          <p:cNvSpPr/>
+          <p:nvPr/>
+        </p:nvSpPr>
+        <p:spPr>
+          <a:xfrm>
+            <a:off x="3497055" y="1821819"/>
+            <a:ext cx="2422114" cy="802719"/>
+          </a:xfrm>
+          <a:prstGeom prst="roundRect">
+            <a:avLst/>
+          </a:prstGeom>
+          <a:solidFill>
+            <a:schemeClr val="bg1">
+              <a:lumMod val="95000"/>
+            </a:schemeClr>
+          </a:solidFill>
+        </p:spPr>
+        <p:style>
+          <a:lnRef idx="2">
+            <a:schemeClr val="accent1">
+              <a:shade val="15000"/>
+            </a:schemeClr>
+          </a:lnRef>
+          <a:fillRef idx="1">
+            <a:schemeClr val="accent1"/>
+          </a:fillRef>
+          <a:effectRef idx="0">
+            <a:schemeClr val="accent1"/>
+          </a:effectRef>
+          <a:fontRef idx="minor">
+            <a:schemeClr val="lt1"/>
+          </a:fontRef>
+        </p:style>
+        <p:txBody>
+          <a:bodyPr rtlCol="0" anchor="ctr"/>
+          <a:lstStyle/>
+          <a:p>
+            <a:pPr algn="ctr"/>
+            <a:r>
+              <a:rPr lang="en-US" sz="1200" dirty="0">
+                <a:solidFill>
+                  <a:schemeClr val="tx1"/>
+                </a:solidFill>
+              </a:rPr>
+              <a:t>Step 6</a:t>
+            </a:r>
+          </a:p>
+          <a:p>
+            <a:pPr algn="ctr"/>
+            <a:r>
+              <a:rPr lang="en-US" sz="1200" b="1" dirty="0">
+                <a:solidFill>
+                  <a:schemeClr val="tx1"/>
+                </a:solidFill>
+              </a:rPr>
+              <a:t>Evaluate on Independent Validation Set</a:t>
+            </a:r>
+          </a:p>
+          <a:p>
+            <a:pPr algn="ctr"/>
+            <a:r>
+              <a:rPr lang="en-US" sz="1000" dirty="0">
+                <a:solidFill>
+                  <a:schemeClr val="tx1"/>
+                </a:solidFill>
+              </a:rPr>
+              <a:t>    Final unbiased performance estimate</a:t>
+            </a:r>
+            <a:endParaRPr lang="en-NL" sz="1000" i="1" dirty="0">
+              <a:solidFill>
+                <a:schemeClr val="tx1"/>
+              </a:solidFill>
+            </a:endParaRPr>
+          </a:p>
+        </p:txBody>
+      </p:sp>
+      <p:sp>
+        <p:nvSpPr>
+          <p:cNvPr id="23" name="Rectangle: Rounded Corners 22">
+            <a:extLst>
+              <a:ext uri="{FF2B5EF4-FFF2-40B4-BE49-F238E27FC236}">
+                <a16:creationId xmlns:a16="http://schemas.microsoft.com/office/drawing/2014/main" id="{F9FEEC0A-66D9-B75B-B12F-BF1BB12C9408}"/>
+              </a:ext>
+            </a:extLst>
+          </p:cNvPr>
+          <p:cNvSpPr/>
+          <p:nvPr/>
+        </p:nvSpPr>
+        <p:spPr>
+          <a:xfrm>
+            <a:off x="146582" y="1821819"/>
+            <a:ext cx="3057307" cy="802719"/>
+          </a:xfrm>
+          <a:prstGeom prst="roundRect">
+            <a:avLst/>
+          </a:prstGeom>
+          <a:solidFill>
+            <a:schemeClr val="bg1">
+              <a:lumMod val="95000"/>
+            </a:schemeClr>
+          </a:solidFill>
+        </p:spPr>
+        <p:style>
+          <a:lnRef idx="2">
+            <a:schemeClr val="accent1">
+              <a:shade val="15000"/>
+            </a:schemeClr>
+          </a:lnRef>
+          <a:fillRef idx="1">
+            <a:schemeClr val="accent1"/>
+          </a:fillRef>
+          <a:effectRef idx="0">
+            <a:schemeClr val="accent1"/>
+          </a:effectRef>
+          <a:fontRef idx="minor">
+            <a:schemeClr val="lt1"/>
+          </a:fontRef>
+        </p:style>
+        <p:txBody>
+          <a:bodyPr rtlCol="0" anchor="ctr"/>
+          <a:lstStyle/>
+          <a:p>
+            <a:pPr algn="ctr"/>
+            <a:r>
+              <a:rPr lang="en-US" sz="1200" dirty="0">
+                <a:solidFill>
+                  <a:schemeClr val="tx1"/>
+                </a:solidFill>
+              </a:rPr>
+              <a:t>Step 2</a:t>
+            </a:r>
+          </a:p>
+          <a:p>
+            <a:pPr algn="ctr"/>
+            <a:r>
+              <a:rPr lang="en-US" sz="1200" b="1" dirty="0">
+                <a:solidFill>
+                  <a:schemeClr val="tx1"/>
+                </a:solidFill>
+              </a:rPr>
+              <a:t>Train / Test / Validation Split</a:t>
+            </a:r>
+          </a:p>
+          <a:p>
+            <a:pPr algn="ctr"/>
+            <a:r>
+              <a:rPr lang="en-US" sz="1000" i="1" dirty="0">
+                <a:solidFill>
+                  <a:schemeClr val="tx1"/>
+                </a:solidFill>
+              </a:rPr>
+              <a:t>Prevent data leakage</a:t>
+            </a:r>
+            <a:endParaRPr lang="en-NL" sz="1000" i="1" dirty="0">
+              <a:solidFill>
+                <a:schemeClr val="tx1"/>
+              </a:solidFill>
+            </a:endParaRPr>
+          </a:p>
+        </p:txBody>
+      </p:sp>
+      <p:sp>
+        <p:nvSpPr>
+          <p:cNvPr id="22" name="Rectangle: Rounded Corners 21">
+            <a:extLst>
+              <a:ext uri="{FF2B5EF4-FFF2-40B4-BE49-F238E27FC236}">
+                <a16:creationId xmlns:a16="http://schemas.microsoft.com/office/drawing/2014/main" id="{5946AF9B-79FC-F8A7-A0A8-A17EC6F1CD0A}"/>
+              </a:ext>
+            </a:extLst>
+          </p:cNvPr>
+          <p:cNvSpPr/>
+          <p:nvPr/>
+        </p:nvSpPr>
+        <p:spPr>
+          <a:xfrm>
+            <a:off x="3497055" y="3846065"/>
+            <a:ext cx="2422114" cy="1074943"/>
+          </a:xfrm>
+          <a:prstGeom prst="roundRect">
+            <a:avLst/>
+          </a:prstGeom>
+          <a:solidFill>
+            <a:schemeClr val="bg1">
+              <a:lumMod val="95000"/>
+            </a:schemeClr>
+          </a:solidFill>
+        </p:spPr>
+        <p:style>
+          <a:lnRef idx="2">
+            <a:schemeClr val="accent1">
+              <a:shade val="15000"/>
+            </a:schemeClr>
+          </a:lnRef>
+          <a:fillRef idx="1">
+            <a:schemeClr val="accent1"/>
+          </a:fillRef>
+          <a:effectRef idx="0">
+            <a:schemeClr val="accent1"/>
+          </a:effectRef>
+          <a:fontRef idx="minor">
+            <a:schemeClr val="lt1"/>
+          </a:fontRef>
+        </p:style>
+        <p:txBody>
+          <a:bodyPr rtlCol="0" anchor="ctr"/>
+          <a:lstStyle/>
+          <a:p>
+            <a:pPr algn="ctr"/>
+            <a:r>
+              <a:rPr lang="en-US" sz="1200" dirty="0">
+                <a:solidFill>
+                  <a:schemeClr val="tx1"/>
+                </a:solidFill>
+              </a:rPr>
+              <a:t>Step 8</a:t>
+            </a:r>
+          </a:p>
+          <a:p>
+            <a:pPr algn="ctr"/>
+            <a:r>
+              <a:rPr lang="en-US" sz="1200" b="1" dirty="0">
+                <a:solidFill>
+                  <a:schemeClr val="tx1"/>
+                </a:solidFill>
+              </a:rPr>
+              <a:t>  Visualize Hyperparameter Search Space</a:t>
+            </a:r>
+          </a:p>
+          <a:p>
+            <a:pPr algn="ctr"/>
+            <a:r>
+              <a:rPr lang="en-US" sz="1000" dirty="0">
+                <a:solidFill>
+                  <a:schemeClr val="tx1"/>
+                </a:solidFill>
+              </a:rPr>
+              <a:t>Model performance vs parameters</a:t>
+            </a:r>
+            <a:endParaRPr lang="en-NL" sz="1000" i="1" dirty="0">
+              <a:solidFill>
+                <a:schemeClr val="tx1"/>
+              </a:solidFill>
+            </a:endParaRPr>
+          </a:p>
+        </p:txBody>
+      </p:sp>
+      <p:sp>
+        <p:nvSpPr>
+          <p:cNvPr id="4" name="Rectangle: Rounded Corners 3">
+            <a:extLst>
+              <a:ext uri="{FF2B5EF4-FFF2-40B4-BE49-F238E27FC236}">
+                <a16:creationId xmlns:a16="http://schemas.microsoft.com/office/drawing/2014/main" id="{36751415-172E-8BED-7D21-7F4100A26CFA}"/>
+              </a:ext>
+            </a:extLst>
+          </p:cNvPr>
+          <p:cNvSpPr/>
+          <p:nvPr/>
+        </p:nvSpPr>
+        <p:spPr>
+          <a:xfrm>
+            <a:off x="146583" y="809696"/>
+            <a:ext cx="3057305" cy="802719"/>
+          </a:xfrm>
+          <a:prstGeom prst="roundRect">
+            <a:avLst/>
+          </a:prstGeom>
+          <a:solidFill>
+            <a:schemeClr val="tx2">
+              <a:lumMod val="20000"/>
+              <a:lumOff val="80000"/>
+            </a:schemeClr>
+          </a:solidFill>
+        </p:spPr>
+        <p:style>
+          <a:lnRef idx="2">
+            <a:schemeClr val="accent1">
+              <a:shade val="15000"/>
+            </a:schemeClr>
+          </a:lnRef>
+          <a:fillRef idx="1">
+            <a:schemeClr val="accent1"/>
+          </a:fillRef>
+          <a:effectRef idx="0">
+            <a:schemeClr val="accent1"/>
+          </a:effectRef>
+          <a:fontRef idx="minor">
+            <a:schemeClr val="lt1"/>
+          </a:fontRef>
+        </p:style>
+        <p:txBody>
+          <a:bodyPr rtlCol="0" anchor="ctr"/>
+          <a:lstStyle/>
+          <a:p>
+            <a:pPr algn="ctr"/>
+            <a:r>
+              <a:rPr lang="en-US" sz="1200" dirty="0">
+                <a:solidFill>
+                  <a:schemeClr val="tx1"/>
+                </a:solidFill>
+              </a:rPr>
+              <a:t>Step 1</a:t>
+            </a:r>
+          </a:p>
+          <a:p>
+            <a:pPr algn="ctr"/>
+            <a:r>
+              <a:rPr lang="en-US" sz="1200" b="1" dirty="0">
+                <a:solidFill>
+                  <a:schemeClr val="tx1"/>
+                </a:solidFill>
+              </a:rPr>
+              <a:t>Import &amp; Preprocess Dataset</a:t>
+            </a:r>
+          </a:p>
+          <a:p>
+            <a:pPr algn="ctr"/>
+            <a:r>
+              <a:rPr lang="en-US" sz="1000" i="1" dirty="0">
+                <a:solidFill>
+                  <a:schemeClr val="tx1"/>
+                </a:solidFill>
+              </a:rPr>
+              <a:t>Load data, clean, handle missing values</a:t>
+            </a:r>
+            <a:endParaRPr lang="en-NL" sz="1000" i="1" dirty="0">
+              <a:solidFill>
+                <a:schemeClr val="tx1"/>
+              </a:solidFill>
+            </a:endParaRPr>
+          </a:p>
+        </p:txBody>
+      </p:sp>
+      <p:sp>
+        <p:nvSpPr>
+          <p:cNvPr id="7" name="Rectangle: Rounded Corners 6">
+            <a:extLst>
+              <a:ext uri="{FF2B5EF4-FFF2-40B4-BE49-F238E27FC236}">
+                <a16:creationId xmlns:a16="http://schemas.microsoft.com/office/drawing/2014/main" id="{251DED4D-5E2C-12C2-54CB-9C52D3966804}"/>
+              </a:ext>
+            </a:extLst>
+          </p:cNvPr>
+          <p:cNvSpPr/>
+          <p:nvPr/>
+        </p:nvSpPr>
+        <p:spPr>
+          <a:xfrm>
+            <a:off x="146581" y="3846065"/>
+            <a:ext cx="3057307" cy="1074943"/>
+          </a:xfrm>
+          <a:prstGeom prst="roundRect">
+            <a:avLst/>
+          </a:prstGeom>
+          <a:solidFill>
+            <a:schemeClr val="bg1">
+              <a:lumMod val="95000"/>
+            </a:schemeClr>
+          </a:solidFill>
+        </p:spPr>
+        <p:style>
+          <a:lnRef idx="2">
+            <a:schemeClr val="accent1">
+              <a:shade val="15000"/>
+            </a:schemeClr>
+          </a:lnRef>
+          <a:fillRef idx="1">
+            <a:schemeClr val="accent1"/>
+          </a:fillRef>
+          <a:effectRef idx="0">
+            <a:schemeClr val="accent1"/>
+          </a:effectRef>
+          <a:fontRef idx="minor">
+            <a:schemeClr val="lt1"/>
+          </a:fontRef>
+        </p:style>
+        <p:txBody>
+          <a:bodyPr rtlCol="0" anchor="ctr"/>
+          <a:lstStyle/>
+          <a:p>
+            <a:pPr algn="ctr"/>
+            <a:r>
+              <a:rPr lang="en-US" sz="1200" dirty="0">
+                <a:solidFill>
+                  <a:schemeClr val="tx1"/>
+                </a:solidFill>
+              </a:rPr>
+              <a:t>Step 4</a:t>
+            </a:r>
+          </a:p>
+          <a:p>
+            <a:pPr algn="ctr"/>
+            <a:r>
+              <a:rPr lang="en-US" sz="1200" b="1" dirty="0">
+                <a:solidFill>
+                  <a:schemeClr val="tx1"/>
+                </a:solidFill>
+              </a:rPr>
+              <a:t>Nested Cross-Validation Framework</a:t>
+            </a:r>
+          </a:p>
+          <a:p>
+            <a:pPr algn="ctr"/>
+            <a:r>
+              <a:rPr lang="en-US" sz="1000" dirty="0">
+                <a:solidFill>
+                  <a:schemeClr val="tx1"/>
+                </a:solidFill>
+              </a:rPr>
+              <a:t>     Inner Loop: Bayesian Hyperparameter Optimization</a:t>
+            </a:r>
+          </a:p>
+          <a:p>
+            <a:pPr algn="ctr"/>
+            <a:r>
+              <a:rPr lang="en-US" sz="1000" dirty="0">
+                <a:solidFill>
+                  <a:schemeClr val="tx1"/>
+                </a:solidFill>
+              </a:rPr>
+              <a:t>Outer Loop: Cross-validation scoring</a:t>
+            </a:r>
+            <a:endParaRPr lang="en-NL" sz="1000" i="1" dirty="0">
+              <a:solidFill>
+                <a:schemeClr val="tx1"/>
+              </a:solidFill>
+            </a:endParaRPr>
+          </a:p>
+        </p:txBody>
+      </p:sp>
+      <p:sp>
+        <p:nvSpPr>
+          <p:cNvPr id="8" name="Rectangle: Rounded Corners 7">
+            <a:extLst>
+              <a:ext uri="{FF2B5EF4-FFF2-40B4-BE49-F238E27FC236}">
+                <a16:creationId xmlns:a16="http://schemas.microsoft.com/office/drawing/2014/main" id="{8D071BBA-65DB-4CBF-1AE7-453E04CF192A}"/>
+              </a:ext>
+            </a:extLst>
+          </p:cNvPr>
+          <p:cNvSpPr/>
+          <p:nvPr/>
+        </p:nvSpPr>
+        <p:spPr>
+          <a:xfrm>
+            <a:off x="3497055" y="809696"/>
+            <a:ext cx="2422114" cy="802719"/>
+          </a:xfrm>
+          <a:prstGeom prst="roundRect">
+            <a:avLst/>
+          </a:prstGeom>
+          <a:solidFill>
+            <a:schemeClr val="bg1">
+              <a:lumMod val="95000"/>
+            </a:schemeClr>
+          </a:solidFill>
+        </p:spPr>
+        <p:style>
+          <a:lnRef idx="2">
+            <a:schemeClr val="accent1">
+              <a:shade val="15000"/>
+            </a:schemeClr>
+          </a:lnRef>
+          <a:fillRef idx="1">
+            <a:schemeClr val="accent1"/>
+          </a:fillRef>
+          <a:effectRef idx="0">
+            <a:schemeClr val="accent1"/>
+          </a:effectRef>
+          <a:fontRef idx="minor">
+            <a:schemeClr val="lt1"/>
+          </a:fontRef>
+        </p:style>
+        <p:txBody>
+          <a:bodyPr rtlCol="0" anchor="ctr"/>
+          <a:lstStyle/>
+          <a:p>
+            <a:pPr algn="ctr"/>
+            <a:r>
+              <a:rPr lang="en-US" sz="1200" dirty="0">
+                <a:solidFill>
+                  <a:schemeClr val="tx1"/>
+                </a:solidFill>
+              </a:rPr>
+              <a:t>Step 5</a:t>
+            </a:r>
+          </a:p>
+          <a:p>
+            <a:pPr algn="ctr"/>
+            <a:r>
+              <a:rPr lang="en-US" sz="1200" b="1" dirty="0">
+                <a:solidFill>
+                  <a:schemeClr val="tx1"/>
+                </a:solidFill>
+              </a:rPr>
+              <a:t>Select Best Generalizing Model</a:t>
+            </a:r>
+          </a:p>
+          <a:p>
+            <a:pPr algn="ctr"/>
+            <a:r>
+              <a:rPr lang="en-US" sz="1000" dirty="0">
+                <a:solidFill>
+                  <a:schemeClr val="tx1"/>
+                </a:solidFill>
+              </a:rPr>
+              <a:t>Compare CV performance</a:t>
+            </a:r>
+          </a:p>
+          <a:p>
+            <a:pPr algn="ctr"/>
+            <a:r>
+              <a:rPr lang="en-US" sz="1000" dirty="0">
+                <a:solidFill>
+                  <a:schemeClr val="tx1"/>
+                </a:solidFill>
+              </a:rPr>
+              <a:t>Avoid overfitting </a:t>
+            </a:r>
+            <a:endParaRPr lang="en-NL" sz="1000" i="1" dirty="0">
+              <a:solidFill>
+                <a:schemeClr val="tx1"/>
+              </a:solidFill>
+            </a:endParaRPr>
+          </a:p>
+        </p:txBody>
+      </p:sp>
+      <p:sp>
+        <p:nvSpPr>
+          <p:cNvPr id="12" name="Rectangle: Rounded Corners 11">
+            <a:extLst>
+              <a:ext uri="{FF2B5EF4-FFF2-40B4-BE49-F238E27FC236}">
+                <a16:creationId xmlns:a16="http://schemas.microsoft.com/office/drawing/2014/main" id="{6B594F52-E843-714A-CD29-5DBE6A3688F3}"/>
+              </a:ext>
+            </a:extLst>
+          </p:cNvPr>
+          <p:cNvSpPr/>
+          <p:nvPr/>
+        </p:nvSpPr>
+        <p:spPr>
+          <a:xfrm>
+            <a:off x="3497053" y="5141938"/>
+            <a:ext cx="2422116" cy="711974"/>
+          </a:xfrm>
+          <a:prstGeom prst="roundRect">
+            <a:avLst/>
+          </a:prstGeom>
+          <a:solidFill>
+            <a:schemeClr val="tx2">
+              <a:lumMod val="20000"/>
+              <a:lumOff val="80000"/>
+            </a:schemeClr>
+          </a:solidFill>
+        </p:spPr>
+        <p:style>
+          <a:lnRef idx="2">
+            <a:schemeClr val="accent1">
+              <a:shade val="15000"/>
+            </a:schemeClr>
+          </a:lnRef>
+          <a:fillRef idx="1">
+            <a:schemeClr val="accent1"/>
+          </a:fillRef>
+          <a:effectRef idx="0">
+            <a:schemeClr val="accent1"/>
+          </a:effectRef>
+          <a:fontRef idx="minor">
+            <a:schemeClr val="lt1"/>
+          </a:fontRef>
+        </p:style>
+        <p:txBody>
+          <a:bodyPr rtlCol="0" anchor="ctr"/>
+          <a:lstStyle/>
+          <a:p>
+            <a:pPr algn="ctr"/>
+            <a:r>
+              <a:rPr lang="en-US" sz="1200" dirty="0">
+                <a:solidFill>
+                  <a:schemeClr val="tx1"/>
+                </a:solidFill>
+              </a:rPr>
+              <a:t>Step 9</a:t>
+            </a:r>
+          </a:p>
+          <a:p>
+            <a:pPr algn="ctr"/>
+            <a:r>
+              <a:rPr lang="en-US" sz="1200" b="1" dirty="0">
+                <a:solidFill>
+                  <a:schemeClr val="tx1"/>
+                </a:solidFill>
+              </a:rPr>
+              <a:t>Interpret Results </a:t>
+            </a:r>
+          </a:p>
+          <a:p>
+            <a:pPr algn="ctr"/>
+            <a:r>
+              <a:rPr lang="en-US" sz="1000" dirty="0">
+                <a:solidFill>
+                  <a:schemeClr val="tx1"/>
+                </a:solidFill>
+              </a:rPr>
+              <a:t>Model behavior , Feature/parameter insights, Practical conclusions</a:t>
+            </a:r>
+            <a:endParaRPr lang="en-NL" sz="1000" i="1" dirty="0">
+              <a:solidFill>
+                <a:schemeClr val="tx1"/>
+              </a:solidFill>
+            </a:endParaRPr>
+          </a:p>
+        </p:txBody>
+      </p:sp>
+      <p:sp>
+        <p:nvSpPr>
+          <p:cNvPr id="13" name="TextBox 12">
+            <a:extLst>
+              <a:ext uri="{FF2B5EF4-FFF2-40B4-BE49-F238E27FC236}">
+                <a16:creationId xmlns:a16="http://schemas.microsoft.com/office/drawing/2014/main" id="{27926284-3D47-7403-CDBD-AC507AC39292}"/>
+              </a:ext>
+            </a:extLst>
+          </p:cNvPr>
+          <p:cNvSpPr txBox="1"/>
+          <p:nvPr/>
+        </p:nvSpPr>
+        <p:spPr>
+          <a:xfrm>
+            <a:off x="300147" y="230960"/>
+            <a:ext cx="5382436" cy="369332"/>
+          </a:xfrm>
+          <a:prstGeom prst="rect">
+            <a:avLst/>
+          </a:prstGeom>
+          <a:noFill/>
+        </p:spPr>
+        <p:txBody>
+          <a:bodyPr wrap="none" rtlCol="0">
+            <a:spAutoFit/>
+          </a:bodyPr>
+          <a:lstStyle/>
+          <a:p>
+            <a:r>
+              <a:rPr lang="en-US" dirty="0"/>
+              <a:t>Flowchart Towards a </a:t>
+            </a:r>
+            <a:r>
+              <a:rPr lang="en-US" dirty="0" err="1"/>
+              <a:t>Hyperoptimized</a:t>
+            </a:r>
+            <a:r>
+              <a:rPr lang="en-US" dirty="0"/>
+              <a:t> Regression Model</a:t>
+            </a:r>
+            <a:endParaRPr lang="en-NL" dirty="0"/>
+          </a:p>
+        </p:txBody>
+      </p:sp>
+      <p:sp>
+        <p:nvSpPr>
+          <p:cNvPr id="15" name="Arrow: Down 14">
+            <a:extLst>
+              <a:ext uri="{FF2B5EF4-FFF2-40B4-BE49-F238E27FC236}">
+                <a16:creationId xmlns:a16="http://schemas.microsoft.com/office/drawing/2014/main" id="{F851AC5F-E7CC-E5D0-B3F6-21EA66BD251C}"/>
+              </a:ext>
+            </a:extLst>
+          </p:cNvPr>
+          <p:cNvSpPr/>
+          <p:nvPr/>
+        </p:nvSpPr>
+        <p:spPr>
+          <a:xfrm>
+            <a:off x="146581" y="1612415"/>
+            <a:ext cx="359481" cy="3308594"/>
+          </a:xfrm>
+          <a:prstGeom prst="downArrow">
+            <a:avLst/>
+          </a:prstGeom>
+          <a:solidFill>
+            <a:schemeClr val="tx2">
+              <a:lumMod val="40000"/>
+              <a:lumOff val="60000"/>
+            </a:schemeClr>
+          </a:solidFill>
+          <a:ln>
+            <a:solidFill>
+              <a:schemeClr val="bg1"/>
+            </a:solidFill>
+          </a:ln>
+          <a:effectLst/>
+        </p:spPr>
+        <p:style>
+          <a:lnRef idx="2">
+            <a:schemeClr val="accent1">
+              <a:shade val="15000"/>
+            </a:schemeClr>
+          </a:lnRef>
+          <a:fillRef idx="1">
+            <a:schemeClr val="accent1"/>
+          </a:fillRef>
+          <a:effectRef idx="0">
+            <a:schemeClr val="accent1"/>
+          </a:effectRef>
+          <a:fontRef idx="minor">
+            <a:schemeClr val="lt1"/>
+          </a:fontRef>
+        </p:style>
+        <p:txBody>
+          <a:bodyPr rtlCol="0" anchor="ctr"/>
+          <a:lstStyle/>
+          <a:p>
+            <a:pPr algn="ctr"/>
+            <a:endParaRPr lang="en-NL"/>
+          </a:p>
+        </p:txBody>
+      </p:sp>
+      <p:sp>
+        <p:nvSpPr>
+          <p:cNvPr id="16" name="Rectangle: Rounded Corners 15">
+            <a:extLst>
+              <a:ext uri="{FF2B5EF4-FFF2-40B4-BE49-F238E27FC236}">
+                <a16:creationId xmlns:a16="http://schemas.microsoft.com/office/drawing/2014/main" id="{71B17532-6896-BED8-0420-444EEDFEA87E}"/>
+              </a:ext>
+            </a:extLst>
+          </p:cNvPr>
+          <p:cNvSpPr/>
+          <p:nvPr/>
+        </p:nvSpPr>
+        <p:spPr>
+          <a:xfrm>
+            <a:off x="146582" y="2833942"/>
+            <a:ext cx="3057307" cy="802719"/>
+          </a:xfrm>
+          <a:prstGeom prst="roundRect">
+            <a:avLst/>
+          </a:prstGeom>
+          <a:solidFill>
+            <a:schemeClr val="bg1">
+              <a:lumMod val="95000"/>
+            </a:schemeClr>
+          </a:solidFill>
+        </p:spPr>
+        <p:style>
+          <a:lnRef idx="2">
+            <a:schemeClr val="accent1">
+              <a:shade val="15000"/>
+            </a:schemeClr>
+          </a:lnRef>
+          <a:fillRef idx="1">
+            <a:schemeClr val="accent1"/>
+          </a:fillRef>
+          <a:effectRef idx="0">
+            <a:schemeClr val="accent1"/>
+          </a:effectRef>
+          <a:fontRef idx="minor">
+            <a:schemeClr val="lt1"/>
+          </a:fontRef>
+        </p:style>
+        <p:txBody>
+          <a:bodyPr rtlCol="0" anchor="ctr"/>
+          <a:lstStyle/>
+          <a:p>
+            <a:pPr algn="ctr"/>
+            <a:r>
+              <a:rPr lang="en-US" sz="1200" dirty="0">
+                <a:solidFill>
+                  <a:schemeClr val="tx1"/>
+                </a:solidFill>
+              </a:rPr>
+              <a:t>Step 3</a:t>
+            </a:r>
+          </a:p>
+          <a:p>
+            <a:pPr algn="ctr"/>
+            <a:r>
+              <a:rPr lang="en-US" sz="1200" b="1" dirty="0">
+                <a:solidFill>
+                  <a:schemeClr val="tx1"/>
+                </a:solidFill>
+              </a:rPr>
+              <a:t>Select Evaluation Metric</a:t>
+            </a:r>
+          </a:p>
+          <a:p>
+            <a:pPr algn="ctr"/>
+            <a:r>
+              <a:rPr lang="en-US" sz="1000" dirty="0">
+                <a:solidFill>
+                  <a:schemeClr val="tx1"/>
+                </a:solidFill>
+              </a:rPr>
+              <a:t>RMSE / MAE / R²</a:t>
+            </a:r>
+          </a:p>
+          <a:p>
+            <a:pPr algn="ctr"/>
+            <a:r>
+              <a:rPr lang="en-US" sz="1000" i="1" dirty="0">
+                <a:solidFill>
+                  <a:schemeClr val="tx1"/>
+                </a:solidFill>
+              </a:rPr>
+              <a:t>Define target</a:t>
+            </a:r>
+            <a:endParaRPr lang="en-NL" sz="1000" i="1" dirty="0">
+              <a:solidFill>
+                <a:schemeClr val="tx1"/>
+              </a:solidFill>
+            </a:endParaRPr>
+          </a:p>
+        </p:txBody>
+      </p:sp>
+      <p:sp>
+        <p:nvSpPr>
+          <p:cNvPr id="17" name="Arrow: Down 16">
+            <a:extLst>
+              <a:ext uri="{FF2B5EF4-FFF2-40B4-BE49-F238E27FC236}">
+                <a16:creationId xmlns:a16="http://schemas.microsoft.com/office/drawing/2014/main" id="{31C7F091-BFD4-D6F3-F863-4654C1AB33B1}"/>
+              </a:ext>
+            </a:extLst>
+          </p:cNvPr>
+          <p:cNvSpPr/>
+          <p:nvPr/>
+        </p:nvSpPr>
+        <p:spPr>
+          <a:xfrm>
+            <a:off x="3497054" y="1612414"/>
+            <a:ext cx="359481" cy="3529524"/>
+          </a:xfrm>
+          <a:prstGeom prst="downArrow">
+            <a:avLst/>
+          </a:prstGeom>
+          <a:solidFill>
+            <a:schemeClr val="tx2">
+              <a:lumMod val="40000"/>
+              <a:lumOff val="60000"/>
+            </a:schemeClr>
+          </a:solidFill>
+          <a:ln>
+            <a:solidFill>
+              <a:schemeClr val="bg1"/>
+            </a:solidFill>
+          </a:ln>
+          <a:effectLst/>
+        </p:spPr>
+        <p:style>
+          <a:lnRef idx="2">
+            <a:schemeClr val="accent1">
+              <a:shade val="15000"/>
+            </a:schemeClr>
+          </a:lnRef>
+          <a:fillRef idx="1">
+            <a:schemeClr val="accent1"/>
+          </a:fillRef>
+          <a:effectRef idx="0">
+            <a:schemeClr val="accent1"/>
+          </a:effectRef>
+          <a:fontRef idx="minor">
+            <a:schemeClr val="lt1"/>
+          </a:fontRef>
+        </p:style>
+        <p:txBody>
+          <a:bodyPr rtlCol="0" anchor="ctr"/>
+          <a:lstStyle/>
+          <a:p>
+            <a:pPr algn="ctr"/>
+            <a:endParaRPr lang="en-NL"/>
+          </a:p>
+        </p:txBody>
+      </p:sp>
+      <p:sp>
+        <p:nvSpPr>
+          <p:cNvPr id="20" name="Rectangle: Rounded Corners 19">
+            <a:extLst>
+              <a:ext uri="{FF2B5EF4-FFF2-40B4-BE49-F238E27FC236}">
+                <a16:creationId xmlns:a16="http://schemas.microsoft.com/office/drawing/2014/main" id="{8B4634E9-34A3-5A4C-C74D-C989A6FC2339}"/>
+              </a:ext>
+            </a:extLst>
+          </p:cNvPr>
+          <p:cNvSpPr/>
+          <p:nvPr/>
+        </p:nvSpPr>
+        <p:spPr>
+          <a:xfrm>
+            <a:off x="3497055" y="2833942"/>
+            <a:ext cx="2422114" cy="802719"/>
+          </a:xfrm>
+          <a:prstGeom prst="roundRect">
+            <a:avLst/>
+          </a:prstGeom>
+          <a:solidFill>
+            <a:schemeClr val="bg1">
+              <a:lumMod val="95000"/>
+            </a:schemeClr>
+          </a:solidFill>
+        </p:spPr>
+        <p:style>
+          <a:lnRef idx="2">
+            <a:schemeClr val="accent1">
+              <a:shade val="15000"/>
+            </a:schemeClr>
+          </a:lnRef>
+          <a:fillRef idx="1">
+            <a:schemeClr val="accent1"/>
+          </a:fillRef>
+          <a:effectRef idx="0">
+            <a:schemeClr val="accent1"/>
+          </a:effectRef>
+          <a:fontRef idx="minor">
+            <a:schemeClr val="lt1"/>
+          </a:fontRef>
+        </p:style>
+        <p:txBody>
+          <a:bodyPr rtlCol="0" anchor="ctr"/>
+          <a:lstStyle/>
+          <a:p>
+            <a:pPr algn="ctr"/>
+            <a:r>
+              <a:rPr lang="en-US" sz="1200" dirty="0">
+                <a:solidFill>
+                  <a:schemeClr val="tx1"/>
+                </a:solidFill>
+              </a:rPr>
+              <a:t>Step 7</a:t>
+            </a:r>
+          </a:p>
+          <a:p>
+            <a:pPr algn="ctr"/>
+            <a:r>
+              <a:rPr lang="en-US" sz="1200" b="1" dirty="0">
+                <a:solidFill>
+                  <a:schemeClr val="tx1"/>
+                </a:solidFill>
+              </a:rPr>
+              <a:t>Train Final Model on Full Dataset</a:t>
+            </a:r>
+          </a:p>
+          <a:p>
+            <a:pPr algn="ctr"/>
+            <a:r>
+              <a:rPr lang="en-US" sz="1000" dirty="0">
+                <a:solidFill>
+                  <a:schemeClr val="tx1"/>
+                </a:solidFill>
+              </a:rPr>
+              <a:t>Use optimal hyperparameters</a:t>
+            </a:r>
+            <a:endParaRPr lang="en-NL" sz="1000" i="1" dirty="0">
+              <a:solidFill>
+                <a:schemeClr val="tx1"/>
+              </a:solidFill>
+            </a:endParaRPr>
+          </a:p>
+        </p:txBody>
+      </p:sp>
+    </p:spTree>
+    <p:extLst>
+      <p:ext uri="{BB962C8B-B14F-4D97-AF65-F5344CB8AC3E}">
+        <p14:creationId xmlns:p14="http://schemas.microsoft.com/office/powerpoint/2010/main" val="1871235197"/>
       </p:ext>
     </p:extLst>
   </p:cSld>
